--- a/e2e/pptx/fixtures/inspector-reset-actions.pptx
+++ b/e2e/pptx/fixtures/inspector-reset-actions.pptx
@@ -620,7 +620,7 @@
             <a:audioFile r:link="rIdAudio"/>
             <p:extLst>
               <p:ext uri="{DAA4B4D4-6D71-4841-9C94-3DE7FCFB9230}">
-                <p14:media xmlns:p14="http://schemas.microsoft.com/office/powerpoint/2010/main" r:embed="rIdAudio">
+                <p14:media xmlns:p14="http://schemas.microsoft.com/office/powerpoint/2010/main" r:embed="rIdMedia">
                   <p14:trim st="500"/>
                 </p14:media>
               </p:ext>
